--- a/Day30-LLM-Security-and-Guardrails/Day30_Deck_LLM_Security_and_Guardrails.pptx
+++ b/Day30-LLM-Security-and-Guardrails/Day30_Deck_LLM_Security_and_Guardrails.pptx
@@ -7037,13 +7037,13 @@
           <a:noFill/>
         </p:spPr>
         <p:txBody>
-          <a:bodyPr wrap="square" lIns="0" rIns="0" tIns="0" bIns="0" anchor="t">
-            <a:spAutoFit/>
-          </a:bodyPr>
-          <a:lstStyle/>
-          <a:p>
-            <a:r>
-              <a:rPr sz="1243" b="0" i="0">
+          <a:bodyPr wrap="none" lIns="0" rIns="0" tIns="0" bIns="0" anchor="t">
+            <a:spAutoFit/>
+          </a:bodyPr>
+          <a:lstStyle/>
+          <a:p>
+            <a:r>
+              <a:rPr sz="1094" b="0" i="0">
                 <a:solidFill>
                   <a:srgbClr val="EAF7F5"/>
                 </a:solidFill>
@@ -7054,7 +7054,7 @@
           </a:p>
           <a:p>
             <a:r>
-              <a:rPr sz="1243" b="0" i="0">
+              <a:rPr sz="1094" b="0" i="0">
                 <a:solidFill>
                   <a:srgbClr val="EAF7F5"/>
                 </a:solidFill>
@@ -7065,7 +7065,7 @@
           </a:p>
           <a:p>
             <a:r>
-              <a:rPr sz="1243" b="0" i="0">
+              <a:rPr sz="1094" b="0" i="0">
                 <a:solidFill>
                   <a:srgbClr val="EAF7F5"/>
                 </a:solidFill>
@@ -7076,7 +7076,7 @@
           </a:p>
           <a:p>
             <a:r>
-              <a:rPr sz="1243" b="0" i="0">
+              <a:rPr sz="1094" b="0" i="0">
                 <a:solidFill>
                   <a:srgbClr val="EAF7F5"/>
                 </a:solidFill>
@@ -7087,7 +7087,7 @@
           </a:p>
           <a:p>
             <a:r>
-              <a:rPr sz="1243" b="0" i="0">
+              <a:rPr sz="1094" b="0" i="0">
                 <a:solidFill>
                   <a:srgbClr val="EAF7F5"/>
                 </a:solidFill>
@@ -7098,7 +7098,7 @@
           </a:p>
           <a:p>
             <a:r>
-              <a:rPr sz="1243" b="0" i="0">
+              <a:rPr sz="1094" b="0" i="0">
                 <a:solidFill>
                   <a:srgbClr val="EAF7F5"/>
                 </a:solidFill>
@@ -7109,7 +7109,7 @@
           </a:p>
           <a:p>
             <a:r>
-              <a:rPr sz="1243" b="0" i="0">
+              <a:rPr sz="1094" b="0" i="0">
                 <a:solidFill>
                   <a:srgbClr val="EAF7F5"/>
                 </a:solidFill>
@@ -7120,7 +7120,7 @@
           </a:p>
           <a:p>
             <a:r>
-              <a:rPr sz="1243" b="0" i="0">
+              <a:rPr sz="1094" b="0" i="0">
                 <a:solidFill>
                   <a:srgbClr val="EAF7F5"/>
                 </a:solidFill>
@@ -7131,7 +7131,7 @@
           </a:p>
           <a:p>
             <a:r>
-              <a:rPr sz="1243" b="0" i="0">
+              <a:rPr sz="1094" b="0" i="0">
                 <a:solidFill>
                   <a:srgbClr val="EAF7F5"/>
                 </a:solidFill>
@@ -7142,7 +7142,7 @@
           </a:p>
           <a:p>
             <a:r>
-              <a:rPr sz="1243" b="0" i="0">
+              <a:rPr sz="1094" b="0" i="0">
                 <a:solidFill>
                   <a:srgbClr val="EAF7F5"/>
                 </a:solidFill>
@@ -7430,13 +7430,13 @@
           <a:noFill/>
         </p:spPr>
         <p:txBody>
-          <a:bodyPr wrap="square" lIns="0" rIns="0" tIns="0" bIns="0" anchor="t">
-            <a:spAutoFit/>
-          </a:bodyPr>
-          <a:lstStyle/>
-          <a:p>
-            <a:r>
-              <a:rPr sz="1133" b="0" i="0">
+          <a:bodyPr wrap="none" lIns="0" rIns="0" tIns="0" bIns="0" anchor="t">
+            <a:spAutoFit/>
+          </a:bodyPr>
+          <a:lstStyle/>
+          <a:p>
+            <a:r>
+              <a:rPr sz="997" b="0" i="0">
                 <a:solidFill>
                   <a:srgbClr val="EAF7F5"/>
                 </a:solidFill>
@@ -7447,7 +7447,7 @@
           </a:p>
           <a:p>
             <a:r>
-              <a:rPr sz="1133" b="0" i="0">
+              <a:rPr sz="997" b="0" i="0">
                 <a:solidFill>
                   <a:srgbClr val="EAF7F5"/>
                 </a:solidFill>
@@ -7458,7 +7458,7 @@
           </a:p>
           <a:p>
             <a:r>
-              <a:rPr sz="1133" b="0" i="0">
+              <a:rPr sz="997" b="0" i="0">
                 <a:solidFill>
                   <a:srgbClr val="EAF7F5"/>
                 </a:solidFill>
@@ -7469,7 +7469,7 @@
           </a:p>
           <a:p>
             <a:r>
-              <a:rPr sz="1133" b="0" i="0">
+              <a:rPr sz="997" b="0" i="0">
                 <a:solidFill>
                   <a:srgbClr val="EAF7F5"/>
                 </a:solidFill>
@@ -7480,7 +7480,7 @@
           </a:p>
           <a:p>
             <a:r>
-              <a:rPr sz="1133" b="0" i="0">
+              <a:rPr sz="997" b="0" i="0">
                 <a:solidFill>
                   <a:srgbClr val="EAF7F5"/>
                 </a:solidFill>
@@ -7491,7 +7491,7 @@
           </a:p>
           <a:p>
             <a:r>
-              <a:rPr sz="1133" b="0" i="0">
+              <a:rPr sz="997" b="0" i="0">
                 <a:solidFill>
                   <a:srgbClr val="EAF7F5"/>
                 </a:solidFill>
@@ -7502,7 +7502,7 @@
           </a:p>
           <a:p>
             <a:r>
-              <a:rPr sz="1133" b="0" i="0">
+              <a:rPr sz="997" b="0" i="0">
                 <a:solidFill>
                   <a:srgbClr val="EAF7F5"/>
                 </a:solidFill>
@@ -7513,7 +7513,7 @@
           </a:p>
           <a:p>
             <a:r>
-              <a:rPr sz="1133" b="0" i="0">
+              <a:rPr sz="997" b="0" i="0">
                 <a:solidFill>
                   <a:srgbClr val="EAF7F5"/>
                 </a:solidFill>
@@ -7524,7 +7524,7 @@
           </a:p>
           <a:p>
             <a:r>
-              <a:rPr sz="1133" b="0" i="0">
+              <a:rPr sz="997" b="0" i="0">
                 <a:solidFill>
                   <a:srgbClr val="EAF7F5"/>
                 </a:solidFill>
@@ -7535,7 +7535,7 @@
           </a:p>
           <a:p>
             <a:r>
-              <a:rPr sz="1133" b="0" i="0">
+              <a:rPr sz="997" b="0" i="0">
                 <a:solidFill>
                   <a:srgbClr val="EAF7F5"/>
                 </a:solidFill>
@@ -12443,13 +12443,13 @@
           <a:noFill/>
         </p:spPr>
         <p:txBody>
-          <a:bodyPr wrap="square" lIns="0" rIns="0" tIns="0" bIns="0" anchor="t">
-            <a:spAutoFit/>
-          </a:bodyPr>
-          <a:lstStyle/>
-          <a:p>
-            <a:r>
-              <a:rPr sz="1085" b="0" i="0">
+          <a:bodyPr wrap="none" lIns="0" rIns="0" tIns="0" bIns="0" anchor="t">
+            <a:spAutoFit/>
+          </a:bodyPr>
+          <a:lstStyle/>
+          <a:p>
+            <a:r>
+              <a:rPr sz="954" b="0" i="0">
                 <a:solidFill>
                   <a:srgbClr val="EAF7F5"/>
                 </a:solidFill>
@@ -12460,7 +12460,7 @@
           </a:p>
           <a:p>
             <a:r>
-              <a:rPr sz="1085" b="0" i="0">
+              <a:rPr sz="954" b="0" i="0">
                 <a:solidFill>
                   <a:srgbClr val="EAF7F5"/>
                 </a:solidFill>
@@ -12471,7 +12471,7 @@
           </a:p>
           <a:p>
             <a:r>
-              <a:rPr sz="1085" b="0" i="0">
+              <a:rPr sz="954" b="0" i="0">
                 <a:solidFill>
                   <a:srgbClr val="EAF7F5"/>
                 </a:solidFill>
@@ -12482,7 +12482,7 @@
           </a:p>
           <a:p>
             <a:r>
-              <a:rPr sz="1085" b="0" i="0">
+              <a:rPr sz="954" b="0" i="0">
                 <a:solidFill>
                   <a:srgbClr val="EAF7F5"/>
                 </a:solidFill>
@@ -12493,7 +12493,7 @@
           </a:p>
           <a:p>
             <a:r>
-              <a:rPr sz="1085" b="0" i="0">
+              <a:rPr sz="954" b="0" i="0">
                 <a:solidFill>
                   <a:srgbClr val="EAF7F5"/>
                 </a:solidFill>
@@ -12504,7 +12504,7 @@
           </a:p>
           <a:p>
             <a:r>
-              <a:rPr sz="1085" b="0" i="0">
+              <a:rPr sz="954" b="0" i="0">
                 <a:solidFill>
                   <a:srgbClr val="EAF7F5"/>
                 </a:solidFill>
@@ -12515,7 +12515,7 @@
           </a:p>
           <a:p>
             <a:r>
-              <a:rPr sz="1085" b="0" i="0">
+              <a:rPr sz="954" b="0" i="0">
                 <a:solidFill>
                   <a:srgbClr val="EAF7F5"/>
                 </a:solidFill>
@@ -12526,7 +12526,7 @@
           </a:p>
           <a:p>
             <a:r>
-              <a:rPr sz="1085" b="0" i="0">
+              <a:rPr sz="954" b="0" i="0">
                 <a:solidFill>
                   <a:srgbClr val="EAF7F5"/>
                 </a:solidFill>
@@ -12537,7 +12537,7 @@
           </a:p>
           <a:p>
             <a:r>
-              <a:rPr sz="1085" b="0" i="0">
+              <a:rPr sz="954" b="0" i="0">
                 <a:solidFill>
                   <a:srgbClr val="EAF7F5"/>
                 </a:solidFill>
@@ -12548,7 +12548,7 @@
           </a:p>
           <a:p>
             <a:r>
-              <a:rPr sz="1085" b="0" i="0">
+              <a:rPr sz="954" b="0" i="0">
                 <a:solidFill>
                   <a:srgbClr val="EAF7F5"/>
                 </a:solidFill>
@@ -12559,7 +12559,7 @@
           </a:p>
           <a:p>
             <a:r>
-              <a:rPr sz="1085" b="0" i="0">
+              <a:rPr sz="954" b="0" i="0">
                 <a:solidFill>
                   <a:srgbClr val="EAF7F5"/>
                 </a:solidFill>
@@ -12570,7 +12570,7 @@
           </a:p>
           <a:p>
             <a:r>
-              <a:rPr sz="1085" b="0" i="0">
+              <a:rPr sz="954" b="0" i="0">
                 <a:solidFill>
                   <a:srgbClr val="EAF7F5"/>
                 </a:solidFill>
@@ -12581,7 +12581,7 @@
           </a:p>
           <a:p>
             <a:r>
-              <a:rPr sz="1085" b="0" i="0">
+              <a:rPr sz="954" b="0" i="0">
                 <a:solidFill>
                   <a:srgbClr val="EAF7F5"/>
                 </a:solidFill>
